--- a/基于MLLM的多智能体协同推理与医疗决策共识机制研究-立项PPT.pptx
+++ b/基于MLLM的多智能体协同推理与医疗决策共识机制研究-立项PPT.pptx
@@ -270,7 +270,7 @@
                 <a:latin typeface="微软雅黑" panose="020B0503020204020204" pitchFamily="34" charset="-122"/>
                 <a:ea typeface="微软雅黑" panose="020B0503020204020204" pitchFamily="34" charset="-122"/>
               </a:rPr>
-              <a:t>2026/06/01</a:t>
+              <a:t>2026/6/1</a:t>
             </a:fld>
             <a:endParaRPr lang="zh-CN" altLang="en-US" dirty="0">
               <a:latin typeface="微软雅黑" panose="020B0503020204020204" pitchFamily="34" charset="-122"/>
@@ -453,7 +453,7 @@
           <a:p>
             <a:fld id="{D2A48B96-639E-45A3-A0BA-2464DFDB1FAA}" type="datetimeFigureOut">
               <a:rPr lang="zh-CN" altLang="en-US" smtClean="0"/>
-              <a:t>2026/06/01</a:t>
+              <a:t>2026/6/1</a:t>
             </a:fld>
             <a:endParaRPr lang="zh-CN" altLang="en-US" dirty="0"/>
           </a:p>
@@ -892,7 +892,7 @@
           <a:p>
             <a:fld id="{85803146-42E8-4762-AC50-92C136F6EA99}" type="datetimeFigureOut">
               <a:rPr lang="zh-CN" altLang="en-US" smtClean="0"/>
-              <a:t>2026/06/01</a:t>
+              <a:t>2026/6/1</a:t>
             </a:fld>
             <a:endParaRPr lang="zh-CN" altLang="en-US"/>
           </a:p>
@@ -2476,7 +2476,7 @@
           <a:p>
             <a:fld id="{D669989D-4831-4E99-B76E-9A53CB0F3A88}" type="datetimeFigureOut">
               <a:rPr lang="zh-CN" altLang="en-US" smtClean="0"/>
-              <a:t>2026/06/01</a:t>
+              <a:t>2026/6/1</a:t>
             </a:fld>
             <a:endParaRPr lang="zh-CN" altLang="en-US" dirty="0"/>
           </a:p>
@@ -18906,7 +18906,7 @@
                 <a:ea typeface="微软雅黑" panose="020B0503020204020204" pitchFamily="34" charset="-122"/>
                 <a:sym typeface="汉仪旗黑-50S"/>
               </a:rPr>
-              <a:t>3200</a:t>
+              <a:t>6000</a:t>
             </a:r>
             <a:r>
               <a:rPr lang="zh-CN" altLang="en-US" sz="900" b="1" dirty="0">
